--- a/inst/extdata/template_blog.pptx
+++ b/inst/extdata/template_blog.pptx
@@ -203,7 +203,7 @@
           <a:p>
             <a:fld id="{E6375376-077A-8F42-9E71-155E70FB596E}" type="datetimeFigureOut">
               <a:rPr lang="en-US" smtClean="0"/>
-              <a:t>4/15/26</a:t>
+              <a:t>4/17/26</a:t>
             </a:fld>
             <a:endParaRPr lang="en-US"/>
           </a:p>
@@ -1153,7 +1153,7 @@
           <a:p>
             <a:fld id="{184C34C6-D93D-964F-98F1-8B05274CB5BF}" type="datetimeFigureOut">
               <a:rPr lang="en-US" smtClean="0"/>
-              <a:t>4/15/26</a:t>
+              <a:t>4/17/26</a:t>
             </a:fld>
             <a:endParaRPr lang="en-US"/>
           </a:p>
@@ -1374,7 +1374,7 @@
           <a:p>
             <a:fld id="{184C34C6-D93D-964F-98F1-8B05274CB5BF}" type="datetimeFigureOut">
               <a:rPr lang="en-US" smtClean="0"/>
-              <a:t>4/15/26</a:t>
+              <a:t>4/17/26</a:t>
             </a:fld>
             <a:endParaRPr lang="en-US" dirty="0"/>
           </a:p>
@@ -1698,7 +1698,7 @@
           <a:p>
             <a:fld id="{184C34C6-D93D-964F-98F1-8B05274CB5BF}" type="datetimeFigureOut">
               <a:rPr lang="en-US" smtClean="0"/>
-              <a:t>4/15/26</a:t>
+              <a:t>4/17/26</a:t>
             </a:fld>
             <a:endParaRPr lang="en-US" dirty="0"/>
           </a:p>
@@ -2215,7 +2215,7 @@
           <a:p>
             <a:fld id="{184C34C6-D93D-964F-98F1-8B05274CB5BF}" type="datetimeFigureOut">
               <a:rPr lang="en-US" smtClean="0"/>
-              <a:t>4/15/26</a:t>
+              <a:t>4/17/26</a:t>
             </a:fld>
             <a:endParaRPr lang="en-US" dirty="0"/>
           </a:p>
@@ -2497,7 +2497,7 @@
           </a:bodyPr>
           <a:lstStyle>
             <a:lvl1pPr>
-              <a:defRPr sz="3200"/>
+              <a:defRPr sz="2800"/>
             </a:lvl1pPr>
           </a:lstStyle>
           <a:p>
@@ -2879,7 +2879,7 @@
           <a:p>
             <a:fld id="{184C34C6-D93D-964F-98F1-8B05274CB5BF}" type="datetimeFigureOut">
               <a:rPr lang="en-AU" noProof="0" smtClean="0"/>
-              <a:t>15/4/2026</a:t>
+              <a:t>17/4/2026</a:t>
             </a:fld>
             <a:endParaRPr lang="en-AU" noProof="0"/>
           </a:p>

--- a/inst/extdata/template_blog.pptx
+++ b/inst/extdata/template_blog.pptx
@@ -203,7 +203,7 @@
           <a:p>
             <a:fld id="{E6375376-077A-8F42-9E71-155E70FB596E}" type="datetimeFigureOut">
               <a:rPr lang="en-US" smtClean="0"/>
-              <a:t>4/17/26</a:t>
+              <a:t>7/14/26</a:t>
             </a:fld>
             <a:endParaRPr lang="en-US"/>
           </a:p>
@@ -1153,7 +1153,7 @@
           <a:p>
             <a:fld id="{184C34C6-D93D-964F-98F1-8B05274CB5BF}" type="datetimeFigureOut">
               <a:rPr lang="en-US" smtClean="0"/>
-              <a:t>4/17/26</a:t>
+              <a:t>7/14/26</a:t>
             </a:fld>
             <a:endParaRPr lang="en-US"/>
           </a:p>
@@ -1374,7 +1374,7 @@
           <a:p>
             <a:fld id="{184C34C6-D93D-964F-98F1-8B05274CB5BF}" type="datetimeFigureOut">
               <a:rPr lang="en-US" smtClean="0"/>
-              <a:t>4/17/26</a:t>
+              <a:t>7/14/26</a:t>
             </a:fld>
             <a:endParaRPr lang="en-US" dirty="0"/>
           </a:p>
@@ -1698,7 +1698,7 @@
           <a:p>
             <a:fld id="{184C34C6-D93D-964F-98F1-8B05274CB5BF}" type="datetimeFigureOut">
               <a:rPr lang="en-US" smtClean="0"/>
-              <a:t>4/17/26</a:t>
+              <a:t>7/14/26</a:t>
             </a:fld>
             <a:endParaRPr lang="en-US" dirty="0"/>
           </a:p>
@@ -2215,7 +2215,7 @@
           <a:p>
             <a:fld id="{184C34C6-D93D-964F-98F1-8B05274CB5BF}" type="datetimeFigureOut">
               <a:rPr lang="en-US" smtClean="0"/>
-              <a:t>4/17/26</a:t>
+              <a:t>7/14/26</a:t>
             </a:fld>
             <a:endParaRPr lang="en-US" dirty="0"/>
           </a:p>
@@ -2485,7 +2485,7 @@
         <p:spPr>
           <a:xfrm>
             <a:off x="196919" y="319665"/>
-            <a:ext cx="6079488" cy="656677"/>
+            <a:ext cx="6254138" cy="656677"/>
           </a:xfrm>
           <a:prstGeom prst="rect">
             <a:avLst/>
@@ -2879,7 +2879,7 @@
           <a:p>
             <a:fld id="{184C34C6-D93D-964F-98F1-8B05274CB5BF}" type="datetimeFigureOut">
               <a:rPr lang="en-AU" noProof="0" smtClean="0"/>
-              <a:t>17/4/2026</a:t>
+              <a:t>14/7/2026</a:t>
             </a:fld>
             <a:endParaRPr lang="en-AU" noProof="0"/>
           </a:p>
